--- a/Aulas/Atualizado/Banco de dados.pptx
+++ b/Aulas/Atualizado/Banco de dados.pptx
@@ -180,12 +180,33 @@
 </p:presentation>
 </file>
 
-<file path=ppt/revisionInfo.xml><?xml version="1.0" encoding="utf-8"?>
-<p1510:revInfo xmlns:a="http://schemas.openxmlformats.org/drawingml/2006/main" xmlns:r="http://schemas.openxmlformats.org/officeDocument/2006/relationships" xmlns:p1510="http://schemas.microsoft.com/office/powerpoint/2015/10/main">
-  <p1510:revLst>
-    <p1510:client id="{3EAEBA44-95CF-4BFA-93AB-DEC293B17B5D}" v="108" dt="2025-04-22T20:09:29.440"/>
-  </p1510:revLst>
-</p1510:revInfo>
+<file path=ppt/changesInfos/changesInfo1.xml><?xml version="1.0" encoding="utf-8"?>
+<pc:chgInfo xmlns:a="http://schemas.openxmlformats.org/drawingml/2006/main" xmlns:r="http://schemas.openxmlformats.org/officeDocument/2006/relationships" xmlns:ac="http://schemas.microsoft.com/office/drawing/2013/main/command" xmlns:pc="http://schemas.microsoft.com/office/powerpoint/2013/main/command">
+  <pc:docChgLst>
+    <pc:chgData name="Nathália Nogueira" userId="72fb52ae66b9bc35" providerId="LiveId" clId="{0411615C-6966-4958-AC18-5EF5FEAD03B0}"/>
+    <pc:docChg chg="custSel modSld">
+      <pc:chgData name="Nathália Nogueira" userId="72fb52ae66b9bc35" providerId="LiveId" clId="{0411615C-6966-4958-AC18-5EF5FEAD03B0}" dt="2025-05-30T23:21:34.896" v="4" actId="13926"/>
+      <pc:docMkLst>
+        <pc:docMk/>
+      </pc:docMkLst>
+      <pc:sldChg chg="modSp mod">
+        <pc:chgData name="Nathália Nogueira" userId="72fb52ae66b9bc35" providerId="LiveId" clId="{0411615C-6966-4958-AC18-5EF5FEAD03B0}" dt="2025-05-30T23:21:34.896" v="4" actId="13926"/>
+        <pc:sldMkLst>
+          <pc:docMk/>
+          <pc:sldMk cId="1126398108" sldId="358"/>
+        </pc:sldMkLst>
+        <pc:spChg chg="mod">
+          <ac:chgData name="Nathália Nogueira" userId="72fb52ae66b9bc35" providerId="LiveId" clId="{0411615C-6966-4958-AC18-5EF5FEAD03B0}" dt="2025-05-30T23:21:34.896" v="4" actId="13926"/>
+          <ac:spMkLst>
+            <pc:docMk/>
+            <pc:sldMk cId="1126398108" sldId="358"/>
+            <ac:spMk id="3" creationId="{ED4DEEC0-878C-3AAF-960A-DEEFCA3EBE35}"/>
+          </ac:spMkLst>
+        </pc:spChg>
+      </pc:sldChg>
+    </pc:docChg>
+  </pc:docChgLst>
+</pc:chgInfo>
 </file>
 
 <file path=ppt/notesMasters/notesMaster1.xml><?xml version="1.0" encoding="utf-8"?>
@@ -270,7 +291,7 @@
           <a:p>
             <a:fld id="{4E76806C-8325-3144-9EEF-A0BCCCFE99C6}" type="datetimeFigureOut">
               <a:rPr lang="pt-BR" smtClean="0"/>
-              <a:t>19/05/2025</a:t>
+              <a:t>30/05/2025</a:t>
             </a:fld>
             <a:endParaRPr lang="pt-BR"/>
           </a:p>
@@ -2143,7 +2164,7 @@
           <a:p>
             <a:fld id="{1D8BD707-D9CF-40AE-B4C6-C98DA3205C09}" type="datetimeFigureOut">
               <a:rPr lang="en-US" smtClean="0"/>
-              <a:t>5/19/25</a:t>
+              <a:t>5/30/2025</a:t>
             </a:fld>
             <a:endParaRPr lang="en-US"/>
           </a:p>
@@ -3257,7 +3278,7 @@
           <a:p>
             <a:fld id="{1D8BD707-D9CF-40AE-B4C6-C98DA3205C09}" type="datetimeFigureOut">
               <a:rPr lang="en-US" smtClean="0"/>
-              <a:t>5/19/25</a:t>
+              <a:t>5/30/2025</a:t>
             </a:fld>
             <a:endParaRPr lang="en-US"/>
           </a:p>
@@ -3926,7 +3947,7 @@
           <a:p>
             <a:fld id="{1D8BD707-D9CF-40AE-B4C6-C98DA3205C09}" type="datetimeFigureOut">
               <a:rPr lang="en-US"/>
-              <a:t>5/19/25</a:t>
+              <a:t>5/30/2025</a:t>
             </a:fld>
             <a:endParaRPr lang="en-US"/>
           </a:p>
@@ -4058,7 +4079,7 @@
           <a:p>
             <a:fld id="{1D8BD707-D9CF-40AE-B4C6-C98DA3205C09}" type="datetimeFigureOut">
               <a:rPr lang="en-US"/>
-              <a:t>5/19/25</a:t>
+              <a:t>5/30/2025</a:t>
             </a:fld>
             <a:endParaRPr lang="en-US"/>
           </a:p>
@@ -4306,7 +4327,7 @@
           <a:p>
             <a:fld id="{7A9A650A-8BD1-4FDE-9899-1C20DF4B7708}" type="datetimeFigureOut">
               <a:rPr lang="en-US" smtClean="0"/>
-              <a:t>5/19/25</a:t>
+              <a:t>5/30/2025</a:t>
             </a:fld>
             <a:endParaRPr lang="en-US" dirty="0"/>
           </a:p>
@@ -8191,7 +8212,7 @@
           <a:p>
             <a:fld id="{7A9A650A-8BD1-4FDE-9899-1C20DF4B7708}" type="datetimeFigureOut">
               <a:rPr lang="en-US" smtClean="0"/>
-              <a:t>5/19/25</a:t>
+              <a:t>5/30/2025</a:t>
             </a:fld>
             <a:endParaRPr lang="en-US" dirty="0"/>
           </a:p>
@@ -8420,7 +8441,7 @@
           <a:p>
             <a:fld id="{DC107E61-D2F8-452B-B53A-91FE1E439E24}" type="datetimeFigureOut">
               <a:rPr lang="en-US" smtClean="0"/>
-              <a:t>5/19/25</a:t>
+              <a:t>5/30/2025</a:t>
             </a:fld>
             <a:endParaRPr lang="en-US" dirty="0"/>
           </a:p>
@@ -8991,7 +9012,7 @@
           <a:p>
             <a:fld id="{A7543A57-F65A-4C42-9156-7629C10666E9}" type="datetimeFigureOut">
               <a:rPr lang="en-US" smtClean="0"/>
-              <a:t>5/19/25</a:t>
+              <a:t>5/30/2025</a:t>
             </a:fld>
             <a:endParaRPr lang="en-US" dirty="0"/>
           </a:p>
@@ -9416,7 +9437,7 @@
           <a:p>
             <a:fld id="{969FBF0B-319E-4F95-BA43-902EB3DC9783}" type="datetimeFigureOut">
               <a:rPr lang="en-US" smtClean="0"/>
-              <a:t>5/19/25</a:t>
+              <a:t>5/30/2025</a:t>
             </a:fld>
             <a:endParaRPr lang="en-US" dirty="0"/>
           </a:p>
@@ -9535,7 +9556,7 @@
           <a:p>
             <a:fld id="{081158B3-6703-4BBB-A09E-33FD65E7DB24}" type="datetimeFigureOut">
               <a:rPr lang="en-US" smtClean="0"/>
-              <a:t>5/19/25</a:t>
+              <a:t>5/30/2025</a:t>
             </a:fld>
             <a:endParaRPr lang="en-US" dirty="0"/>
           </a:p>
@@ -9631,7 +9652,7 @@
           <a:p>
             <a:fld id="{AFFE9955-2DD3-491E-92B6-7018343227CE}" type="datetimeFigureOut">
               <a:rPr lang="en-US" smtClean="0"/>
-              <a:t>5/19/25</a:t>
+              <a:t>5/30/2025</a:t>
             </a:fld>
             <a:endParaRPr lang="en-US" dirty="0"/>
           </a:p>
@@ -9922,7 +9943,7 @@
           <a:p>
             <a:fld id="{19888A28-1D79-4F41-9521-CF26BB2C7EE3}" type="datetimeFigureOut">
               <a:rPr lang="en-US" smtClean="0"/>
-              <a:t>5/19/25</a:t>
+              <a:t>5/30/2025</a:t>
             </a:fld>
             <a:endParaRPr lang="en-US" dirty="0"/>
           </a:p>
@@ -10260,7 +10281,7 @@
           <a:p>
             <a:fld id="{43BD9950-AF07-4F2A-A949-E1C816A93B30}" type="datetimeFigureOut">
               <a:rPr lang="en-US" smtClean="0"/>
-              <a:t>5/19/25</a:t>
+              <a:t>5/30/2025</a:t>
             </a:fld>
             <a:endParaRPr lang="en-US" dirty="0"/>
           </a:p>
@@ -10431,7 +10452,7 @@
           <a:p>
             <a:fld id="{4DA3262D-6073-4A30-973C-53BE1D29884A}" type="datetimeFigureOut">
               <a:rPr lang="en-US" smtClean="0"/>
-              <a:t>5/19/25</a:t>
+              <a:t>5/30/2025</a:t>
             </a:fld>
             <a:endParaRPr lang="en-US" dirty="0"/>
           </a:p>
@@ -10612,7 +10633,7 @@
           <a:p>
             <a:fld id="{C00AB0AF-EEE9-4421-9298-EB11A547E63F}" type="datetimeFigureOut">
               <a:rPr lang="en-US" smtClean="0"/>
-              <a:t>5/19/25</a:t>
+              <a:t>5/30/2025</a:t>
             </a:fld>
             <a:endParaRPr lang="en-US" dirty="0"/>
           </a:p>
@@ -13358,7 +13379,7 @@
           <a:p>
             <a:fld id="{34A43A2E-6632-4F9D-8728-2CF59ACBBE60}" type="datetimeFigureOut">
               <a:rPr lang="en-US" dirty="0"/>
-              <a:t>5/19/25</a:t>
+              <a:t>5/30/2025</a:t>
             </a:fld>
             <a:endParaRPr lang="en-US" dirty="0"/>
           </a:p>
@@ -47152,7 +47173,7 @@
         <p:spPr>
           <a:xfrm>
             <a:off x="685800" y="1714500"/>
-            <a:ext cx="15621000" cy="6475812"/>
+            <a:ext cx="15621000" cy="7768473"/>
           </a:xfrm>
           <a:prstGeom prst="rect">
             <a:avLst/>
@@ -47391,42 +47412,7 @@
                 <a:spcPct val="150000"/>
               </a:lnSpc>
             </a:pPr>
-            <a:r>
-              <a:rPr lang="pt-BR" sz="2800" dirty="0"/>
-              <a:t>    </a:t>
-            </a:r>
-            <a:r>
-              <a:rPr lang="pt-BR" sz="2800" dirty="0" err="1"/>
-              <a:t>professor_id</a:t>
-            </a:r>
-            <a:r>
-              <a:rPr lang="pt-BR" sz="2800" dirty="0"/>
-              <a:t> = </a:t>
-            </a:r>
-            <a:r>
-              <a:rPr lang="pt-BR" sz="2800" dirty="0" err="1"/>
-              <a:t>db.Column</a:t>
-            </a:r>
-            <a:r>
-              <a:rPr lang="pt-BR" sz="2800" dirty="0"/>
-              <a:t>(</a:t>
-            </a:r>
-            <a:r>
-              <a:rPr lang="pt-BR" sz="2800" dirty="0" err="1"/>
-              <a:t>db.Integer</a:t>
-            </a:r>
-            <a:r>
-              <a:rPr lang="pt-BR" sz="2800" dirty="0"/>
-              <a:t>, </a:t>
-            </a:r>
-            <a:r>
-              <a:rPr lang="pt-BR" sz="2800" dirty="0" err="1"/>
-              <a:t>db.ForeignKey</a:t>
-            </a:r>
-            <a:r>
-              <a:rPr lang="pt-BR" sz="2800" dirty="0"/>
-              <a:t>('professor.id'))</a:t>
-            </a:r>
+            <a:endParaRPr lang="pt-BR" sz="2800" dirty="0"/>
           </a:p>
           <a:p>
             <a:pPr>
@@ -47435,23 +47421,134 @@
               </a:lnSpc>
             </a:pPr>
             <a:r>
+              <a:rPr lang="pt-BR" sz="2800" dirty="0">
+                <a:highlight>
+                  <a:srgbClr val="00FF00"/>
+                </a:highlight>
+              </a:rPr>
+              <a:t>    </a:t>
+            </a:r>
+            <a:r>
+              <a:rPr lang="pt-BR" sz="2800" dirty="0" err="1">
+                <a:highlight>
+                  <a:srgbClr val="00FF00"/>
+                </a:highlight>
+              </a:rPr>
+              <a:t>professor_id</a:t>
+            </a:r>
+            <a:r>
+              <a:rPr lang="pt-BR" sz="2800" dirty="0">
+                <a:highlight>
+                  <a:srgbClr val="00FF00"/>
+                </a:highlight>
+              </a:rPr>
+              <a:t> = </a:t>
+            </a:r>
+            <a:r>
+              <a:rPr lang="pt-BR" sz="2800" dirty="0" err="1">
+                <a:highlight>
+                  <a:srgbClr val="00FF00"/>
+                </a:highlight>
+              </a:rPr>
+              <a:t>db.Column</a:t>
+            </a:r>
+            <a:r>
+              <a:rPr lang="pt-BR" sz="2800" dirty="0">
+                <a:highlight>
+                  <a:srgbClr val="00FF00"/>
+                </a:highlight>
+              </a:rPr>
+              <a:t>(</a:t>
+            </a:r>
+            <a:r>
+              <a:rPr lang="pt-BR" sz="2800" dirty="0" err="1">
+                <a:highlight>
+                  <a:srgbClr val="00FF00"/>
+                </a:highlight>
+              </a:rPr>
+              <a:t>db.Integer</a:t>
+            </a:r>
+            <a:r>
+              <a:rPr lang="pt-BR" sz="2800" dirty="0">
+                <a:highlight>
+                  <a:srgbClr val="00FF00"/>
+                </a:highlight>
+              </a:rPr>
+              <a:t>, </a:t>
+            </a:r>
+            <a:r>
+              <a:rPr lang="pt-BR" sz="2800" dirty="0" err="1">
+                <a:highlight>
+                  <a:srgbClr val="00FF00"/>
+                </a:highlight>
+              </a:rPr>
+              <a:t>db.ForeignKey</a:t>
+            </a:r>
+            <a:r>
+              <a:rPr lang="pt-BR" sz="2800" dirty="0">
+                <a:highlight>
+                  <a:srgbClr val="00FF00"/>
+                </a:highlight>
+              </a:rPr>
+              <a:t>('professor.id’))</a:t>
+            </a:r>
+          </a:p>
+          <a:p>
+            <a:pPr>
+              <a:lnSpc>
+                <a:spcPct val="150000"/>
+              </a:lnSpc>
+            </a:pPr>
+            <a:endParaRPr lang="pt-BR" sz="2800" dirty="0"/>
+          </a:p>
+          <a:p>
+            <a:pPr>
+              <a:lnSpc>
+                <a:spcPct val="150000"/>
+              </a:lnSpc>
+            </a:pPr>
+            <a:r>
               <a:rPr lang="pt-BR" sz="2800" dirty="0"/>
-              <a:t>    professor = </a:t>
-            </a:r>
-            <a:r>
-              <a:rPr lang="pt-BR" sz="2800" dirty="0" err="1"/>
+              <a:t>    </a:t>
+            </a:r>
+            <a:r>
+              <a:rPr lang="pt-BR" sz="2800" dirty="0">
+                <a:highlight>
+                  <a:srgbClr val="FFFF00"/>
+                </a:highlight>
+              </a:rPr>
+              <a:t>professor = </a:t>
+            </a:r>
+            <a:r>
+              <a:rPr lang="pt-BR" sz="2800" dirty="0" err="1">
+                <a:highlight>
+                  <a:srgbClr val="FFFF00"/>
+                </a:highlight>
+              </a:rPr>
               <a:t>db.relationship</a:t>
             </a:r>
             <a:r>
-              <a:rPr lang="pt-BR" sz="2800" dirty="0"/>
+              <a:rPr lang="pt-BR" sz="2800" dirty="0">
+                <a:highlight>
+                  <a:srgbClr val="FFFF00"/>
+                </a:highlight>
+              </a:rPr>
               <a:t>('Professor', </a:t>
             </a:r>
             <a:r>
-              <a:rPr lang="pt-BR" sz="2800" dirty="0" err="1"/>
+              <a:rPr lang="pt-BR" sz="2800" dirty="0" err="1">
+                <a:highlight>
+                  <a:srgbClr val="FFFF00"/>
+                </a:highlight>
+              </a:rPr>
               <a:t>back_populates</a:t>
             </a:r>
             <a:r>
-              <a:rPr lang="pt-BR" sz="2800" dirty="0"/>
+              <a:rPr lang="pt-BR" sz="2800" dirty="0">
+                <a:highlight>
+                  <a:srgbClr val="FFFF00"/>
+                </a:highlight>
+              </a:rPr>
               <a:t>='turmas')</a:t>
             </a:r>
           </a:p>
